--- a/Ch10_Madrigal.pptx
+++ b/Ch10_Madrigal.pptx
@@ -3066,7 +3066,7 @@
                 <a:ea typeface="Georgia" pitchFamily="34" charset="-122"/>
                 <a:cs typeface="Georgia" pitchFamily="34" charset="-120"/>
               </a:rPr>
-              <a:t>Le Jeune · Revecy venir du printans (NAWM 54)</a:t>
+              <a:t>Le Jeune · Revecy venir (NAWM 54)</a:t>
             </a:r>
             <a:endParaRPr lang="en-US" sz="1400" dirty="0"/>
           </a:p>
@@ -3105,7 +3105,7 @@
                 <a:ea typeface="Calibri" pitchFamily="34" charset="-122"/>
                 <a:cs typeface="Calibri" pitchFamily="34" charset="-120"/>
               </a:rPr>
-              <a:t>Académie de Poésie et de Musique (1570) · Baïf 的 vers mesurés · 長音節配長音 · 二三拍自由交替</a:t>
+              <a:t>Académie de Poésie et de Musique (1570) · Baïf 的 vers mesurés · 長音配長音節</a:t>
             </a:r>
             <a:endParaRPr lang="en-US" sz="1400" dirty="0"/>
           </a:p>
@@ -4204,7 +4204,7 @@
                 <a:ea typeface="Calibri" pitchFamily="34" charset="-122"/>
                 <a:cs typeface="Calibri" pitchFamily="34" charset="-120"/>
               </a:rPr>
-              <a:t>• 都市商人與工匠的歌唱行會</a:t>
+              <a:t>• 德語城市工匠的音樂行會</a:t>
             </a:r>
             <a:endParaRPr lang="en-US" sz="1400" dirty="0"/>
           </a:p>
@@ -14159,67 +14159,27 @@
                 <a:ea typeface="Calibri" pitchFamily="34" charset="-122"/>
                 <a:cs typeface="Calibri" pitchFamily="34" charset="-120"/>
               </a:rPr>
-              <a:t>• 1540s 於 Naples 興起</a:t>
-            </a:r>
-            <a:endParaRPr lang="en-US" sz="1400" dirty="0"/>
-          </a:p>
-          <a:p>
-            <a:pPr indent="0" marL="0">
-              <a:spcAft>
-                <a:spcPts val="100"/>
-              </a:spcAft>
-              <a:buNone/>
-            </a:pPr>
-            <a:r>
-              <a:rPr lang="en-US" sz="1400" dirty="0">
-                <a:solidFill>
-                  <a:srgbClr val="E8D8A8"/>
-                </a:solidFill>
-                <a:latin typeface="Calibri" pitchFamily="34" charset="0"/>
-                <a:ea typeface="Calibri" pitchFamily="34" charset="-122"/>
-                <a:cs typeface="Calibri" pitchFamily="34" charset="-120"/>
-              </a:rPr>
-              <a:t>• 三聲部、活潑、同節奏</a:t>
-            </a:r>
-            <a:endParaRPr lang="en-US" sz="1400" dirty="0"/>
-          </a:p>
-          <a:p>
-            <a:pPr indent="0" marL="0">
-              <a:spcAft>
-                <a:spcPts val="100"/>
-              </a:spcAft>
-              <a:buNone/>
-            </a:pPr>
-            <a:r>
-              <a:rPr lang="en-US" sz="1400" dirty="0">
-                <a:solidFill>
-                  <a:srgbClr val="E8D8A8"/>
-                </a:solidFill>
-                <a:latin typeface="Calibri" pitchFamily="34" charset="0"/>
-                <a:ea typeface="Calibri" pitchFamily="34" charset="-122"/>
-                <a:cs typeface="Calibri" pitchFamily="34" charset="-120"/>
-              </a:rPr>
-              <a:t>• 故意寫平行五度 → 模仿鄉村樸拙</a:t>
-            </a:r>
-            <a:endParaRPr lang="en-US" sz="1400" dirty="0"/>
-          </a:p>
-          <a:p>
-            <a:pPr indent="0" marL="0">
-              <a:spcAft>
-                <a:spcPts val="100"/>
-              </a:spcAft>
-              <a:buNone/>
-            </a:pPr>
-            <a:r>
-              <a:rPr lang="en-US" sz="1400" dirty="0">
-                <a:solidFill>
-                  <a:srgbClr val="E8D8A8"/>
-                </a:solidFill>
-                <a:latin typeface="Calibri" pitchFamily="34" charset="0"/>
-                <a:ea typeface="Calibri" pitchFamily="34" charset="-122"/>
-                <a:cs typeface="Calibri" pitchFamily="34" charset="-120"/>
-              </a:rPr>
-              <a:t>• 常戲擬嚴肅 madrigal</a:t>
+              <a:t>• 1540s 於 Naples 興起 · 三聲部、活潑、同節奏</a:t>
+            </a:r>
+            <a:endParaRPr lang="en-US" sz="1400" dirty="0"/>
+          </a:p>
+          <a:p>
+            <a:pPr indent="0" marL="0">
+              <a:spcAft>
+                <a:spcPts val="100"/>
+              </a:spcAft>
+              <a:buNone/>
+            </a:pPr>
+            <a:r>
+              <a:rPr lang="en-US" sz="1400" dirty="0">
+                <a:solidFill>
+                  <a:srgbClr val="E8D8A8"/>
+                </a:solidFill>
+                <a:latin typeface="Calibri" pitchFamily="34" charset="0"/>
+                <a:ea typeface="Calibri" pitchFamily="34" charset="-122"/>
+                <a:cs typeface="Calibri" pitchFamily="34" charset="-120"/>
+              </a:rPr>
+              <a:t>• 寫平行五度模仿鄉村樸拙，常戲擬 madrigal</a:t>
             </a:r>
             <a:endParaRPr lang="en-US" sz="1400" dirty="0"/>
           </a:p>
@@ -14337,47 +14297,47 @@
                 <a:ea typeface="Calibri" pitchFamily="34" charset="-122"/>
                 <a:cs typeface="Calibri" pitchFamily="34" charset="-120"/>
               </a:rPr>
-              <a:t>• Gastoldi · 1591/1594</a:t>
-            </a:r>
-            <a:endParaRPr lang="en-US" sz="1400" dirty="0"/>
-          </a:p>
-          <a:p>
-            <a:pPr indent="0" marL="0">
-              <a:spcAft>
-                <a:spcPts val="100"/>
-              </a:spcAft>
-              <a:buNone/>
-            </a:pPr>
-            <a:r>
-              <a:rPr lang="en-US" sz="1400" dirty="0">
-                <a:solidFill>
-                  <a:srgbClr val="E8D8A8"/>
-                </a:solidFill>
-                <a:latin typeface="Calibri" pitchFamily="34" charset="0"/>
-                <a:ea typeface="Calibri" pitchFamily="34" charset="-122"/>
-                <a:cs typeface="Calibri" pitchFamily="34" charset="-120"/>
-              </a:rPr>
-              <a:t>• AABB 分節曲式 · 「fa-la-la」副歌</a:t>
-            </a:r>
-            <a:endParaRPr lang="en-US" sz="1400" dirty="0"/>
-          </a:p>
-          <a:p>
-            <a:pPr indent="0" marL="0">
-              <a:spcAft>
-                <a:spcPts val="100"/>
-              </a:spcAft>
-              <a:buNone/>
-            </a:pPr>
-            <a:r>
-              <a:rPr lang="en-US" sz="1400" dirty="0">
-                <a:solidFill>
-                  <a:srgbClr val="E8D8A8"/>
-                </a:solidFill>
-                <a:latin typeface="Calibri" pitchFamily="34" charset="0"/>
-                <a:ea typeface="Calibri" pitchFamily="34" charset="-122"/>
-                <a:cs typeface="Calibri" pitchFamily="34" charset="-120"/>
-              </a:rPr>
-              <a:t>• Morley《Sing we and chant it》仿 Gastoldi (NAWM 55)</a:t>
+              <a:t>• Gastoldi · 1591/1594 · AABB 分節曲式</a:t>
+            </a:r>
+            <a:endParaRPr lang="en-US" sz="1400" dirty="0"/>
+          </a:p>
+          <a:p>
+            <a:pPr indent="0" marL="0">
+              <a:spcAft>
+                <a:spcPts val="100"/>
+              </a:spcAft>
+              <a:buNone/>
+            </a:pPr>
+            <a:r>
+              <a:rPr lang="en-US" sz="1400" dirty="0">
+                <a:solidFill>
+                  <a:srgbClr val="E8D8A8"/>
+                </a:solidFill>
+                <a:latin typeface="Calibri" pitchFamily="34" charset="0"/>
+                <a:ea typeface="Calibri" pitchFamily="34" charset="-122"/>
+                <a:cs typeface="Calibri" pitchFamily="34" charset="-120"/>
+              </a:rPr>
+              <a:t>• 「fa-la-la」副歌</a:t>
+            </a:r>
+            <a:endParaRPr lang="en-US" sz="1400" dirty="0"/>
+          </a:p>
+          <a:p>
+            <a:pPr indent="0" marL="0">
+              <a:spcAft>
+                <a:spcPts val="100"/>
+              </a:spcAft>
+              <a:buNone/>
+            </a:pPr>
+            <a:r>
+              <a:rPr lang="en-US" sz="1400" dirty="0">
+                <a:solidFill>
+                  <a:srgbClr val="E8D8A8"/>
+                </a:solidFill>
+                <a:latin typeface="Calibri" pitchFamily="34" charset="0"/>
+                <a:ea typeface="Calibri" pitchFamily="34" charset="-122"/>
+                <a:cs typeface="Calibri" pitchFamily="34" charset="-120"/>
+              </a:rPr>
+              <a:t>• Morley · Sing we and chant it (NAWM 55)</a:t>
             </a:r>
             <a:endParaRPr lang="en-US" sz="1400" dirty="0"/>
           </a:p>
